--- a/docs/presentation/DM02_PRESENTATION.pptx
+++ b/docs/presentation/DM02_PRESENTATION.pptx
@@ -17996,11 +17996,116 @@
           </a:fontRef>
         </p:style>
         <p:txBody>
-          <a:bodyPr rtlCol="0" anchor="ctr"/>
+          <a:bodyPr rtlCol="0" anchor="ctr" wrap="square"/>
           <a:lstStyle/>
           <a:p>
-            <a:pPr algn="ctr"/>
+            <a:pPr algn="ctr">
+              <a:defRPr b="1" sz="1800">
+                <a:solidFill>
+                  <a:srgbClr val="0F172A"/>
+                </a:solidFill>
+              </a:defRPr>
+            </a:pPr>
+            <a:r>
+              <a:t>Dual-Database Synergy: Oracle XE + MongoDB Atlas</a:t>
+            </a:r>
             <a:endParaRPr lang="en-US"/>
+          </a:p>
+          <a:p>
+            <a:pPr>
+              <a:defRPr sz="1300" b="1">
+                <a:solidFill>
+                  <a:srgbClr val="2563EB"/>
+                </a:solidFill>
+              </a:defRPr>
+            </a:pPr>
+            <a:r>
+              <a:t>Oracle 21c Database (Transactional &amp; ACID Master Data):</a:t>
+            </a:r>
+          </a:p>
+          <a:p>
+            <a:pPr>
+              <a:defRPr sz="1300">
+                <a:solidFill>
+                  <a:srgbClr val="475569"/>
+                </a:solidFill>
+              </a:defRPr>
+            </a:pPr>
+            <a:r>
+              <a:t>  • Relational Schema: PASSENGER, DRIVER, VEHICLE, ROUTE, TRIP, BOOKING, PAYMENT, MAINTENANCE, FEEDBACK</a:t>
+            </a:r>
+          </a:p>
+          <a:p>
+            <a:pPr>
+              <a:defRPr sz="1300">
+                <a:solidFill>
+                  <a:srgbClr val="475569"/>
+                </a:solidFill>
+              </a:defRPr>
+            </a:pPr>
+            <a:r>
+              <a:t>  • High-Performance PL/SQL: CALCULATE_FARE, MAKE_BOOKING, TRG_MANAGE_SEATS, Cursors, Materialized Views</a:t>
+            </a:r>
+          </a:p>
+          <a:p>
+            <a:pPr>
+              <a:defRPr sz="1300" b="1">
+                <a:solidFill>
+                  <a:srgbClr val="2563EB"/>
+                </a:solidFill>
+              </a:defRPr>
+            </a:pPr>
+            <a:r>
+              <a:t>MongoDB Atlas (Flexible Document &amp; Multimedia Vault):</a:t>
+            </a:r>
+          </a:p>
+          <a:p>
+            <a:pPr>
+              <a:defRPr sz="1300">
+                <a:solidFill>
+                  <a:srgbClr val="475569"/>
+                </a:solidFill>
+              </a:defRPr>
+            </a:pPr>
+            <a:r>
+              <a:t>  • Unstructured Reviews: db.reviews (Ratings, tags, full-text complaint search)</a:t>
+            </a:r>
+          </a:p>
+          <a:p>
+            <a:pPr>
+              <a:defRPr sz="1300">
+                <a:solidFill>
+                  <a:srgbClr val="475569"/>
+                </a:solidFill>
+              </a:defRPr>
+            </a:pPr>
+            <a:r>
+              <a:t>  • Broadcast System: db.announcements (Role-targeted emergency announcements)</a:t>
+            </a:r>
+          </a:p>
+          <a:p>
+            <a:pPr>
+              <a:defRPr sz="1300">
+                <a:solidFill>
+                  <a:srgbClr val="475569"/>
+                </a:solidFill>
+              </a:defRPr>
+            </a:pPr>
+            <a:r>
+              <a:t>  • Media Store: db.vehicle_documents &amp; db.trip_media (Cloud document links &amp; photo galleries)</a:t>
+            </a:r>
+          </a:p>
+          <a:p>
+            <a:pPr>
+              <a:defRPr sz="1300">
+                <a:solidFill>
+                  <a:srgbClr val="475569"/>
+                </a:solidFill>
+              </a:defRPr>
+            </a:pPr>
+            <a:r>
+              <a:t>Cross-Database Stitching via Spring Boot Microservice Gateway (Port 8080).</a:t>
+            </a:r>
           </a:p>
         </p:txBody>
       </p:sp>
@@ -19876,11 +19981,92 @@
           </a:fontRef>
         </p:style>
         <p:txBody>
-          <a:bodyPr rtlCol="0" anchor="ctr"/>
+          <a:bodyPr rtlCol="0" anchor="ctr" wrap="square"/>
           <a:lstStyle/>
           <a:p>
-            <a:pPr algn="ctr"/>
+            <a:pPr algn="ctr">
+              <a:defRPr b="1" sz="1800">
+                <a:solidFill>
+                  <a:srgbClr val="0F172A"/>
+                </a:solidFill>
+              </a:defRPr>
+            </a:pPr>
+            <a:r>
+              <a:t>Key Project Milestones &amp; Technical Achievements</a:t>
+            </a:r>
             <a:endParaRPr lang="en-US"/>
+          </a:p>
+          <a:p>
+            <a:pPr>
+              <a:defRPr sz="1300">
+                <a:solidFill>
+                  <a:srgbClr val="334155"/>
+                </a:solidFill>
+              </a:defRPr>
+            </a:pPr>
+            <a:r>
+              <a:t>✔ Complete microservice architecture with 12 services + Eureka + Spring Cloud Gateway.</a:t>
+            </a:r>
+          </a:p>
+          <a:p>
+            <a:pPr>
+              <a:defRPr sz="1300">
+                <a:solidFill>
+                  <a:srgbClr val="334155"/>
+                </a:solidFill>
+              </a:defRPr>
+            </a:pPr>
+            <a:r>
+              <a:t>✔ Oracle 21c Database with strict 3NF relational integrity and automated seat-trigger locking.</a:t>
+            </a:r>
+          </a:p>
+          <a:p>
+            <a:pPr>
+              <a:defRPr sz="1300">
+                <a:solidFill>
+                  <a:srgbClr val="334155"/>
+                </a:solidFill>
+              </a:defRPr>
+            </a:pPr>
+            <a:r>
+              <a:t>✔ MongoDB Atlas integration for unstructured reviews, documents, and real-time broadcasts.</a:t>
+            </a:r>
+          </a:p>
+          <a:p>
+            <a:pPr>
+              <a:defRPr sz="1300">
+                <a:solidFill>
+                  <a:srgbClr val="334155"/>
+                </a:solidFill>
+              </a:defRPr>
+            </a:pPr>
+            <a:r>
+              <a:t>✔ 5 Executive Business Intelligence reports with automated PDF exports.</a:t>
+            </a:r>
+          </a:p>
+          <a:p>
+            <a:pPr>
+              <a:defRPr sz="1300">
+                <a:solidFill>
+                  <a:srgbClr val="334155"/>
+                </a:solidFill>
+              </a:defRPr>
+            </a:pPr>
+            <a:r>
+              <a:t>✔ Modern React 19 + TypeScript single-page application with real-time background sync.</a:t>
+            </a:r>
+          </a:p>
+          <a:p>
+            <a:pPr>
+              <a:defRPr sz="1300">
+                <a:solidFill>
+                  <a:srgbClr val="334155"/>
+                </a:solidFill>
+              </a:defRPr>
+            </a:pPr>
+            <a:r>
+              <a:t>✔ Robust enterprise disaster recovery with Oracle Data Pump automated logical backups.</a:t>
+            </a:r>
           </a:p>
         </p:txBody>
       </p:sp>
@@ -22534,11 +22720,104 @@
           </a:fontRef>
         </p:style>
         <p:txBody>
-          <a:bodyPr rtlCol="0" anchor="ctr"/>
+          <a:bodyPr rtlCol="0" anchor="ctr" wrap="square"/>
           <a:lstStyle/>
           <a:p>
-            <a:pPr algn="ctr"/>
+            <a:pPr algn="ctr">
+              <a:defRPr b="1" sz="1800">
+                <a:solidFill>
+                  <a:srgbClr val="0F172A"/>
+                </a:solidFill>
+              </a:defRPr>
+            </a:pPr>
+            <a:r>
+              <a:t>Functional &amp; Technical Requirements Overview</a:t>
+            </a:r>
             <a:endParaRPr lang="en-US"/>
+          </a:p>
+          <a:p>
+            <a:pPr>
+              <a:defRPr sz="1300">
+                <a:solidFill>
+                  <a:srgbClr val="334155"/>
+                </a:solidFill>
+              </a:defRPr>
+            </a:pPr>
+            <a:r>
+              <a:t>• User Authentication &amp; Role-Based Access Control (Admin, Driver, Passenger)</a:t>
+            </a:r>
+          </a:p>
+          <a:p>
+            <a:pPr>
+              <a:defRPr sz="1300">
+                <a:solidFill>
+                  <a:srgbClr val="334155"/>
+                </a:solidFill>
+              </a:defRPr>
+            </a:pPr>
+            <a:r>
+              <a:t>• Fleet &amp; Driver Management (Vehicle specs, licenses, ratings, active status)</a:t>
+            </a:r>
+          </a:p>
+          <a:p>
+            <a:pPr>
+              <a:defRPr sz="1300">
+                <a:solidFill>
+                  <a:srgbClr val="334155"/>
+                </a:solidFill>
+              </a:defRPr>
+            </a:pPr>
+            <a:r>
+              <a:t>• Route Planning &amp; Dynamic Fare Calculation (Base fare + distance-based pricing)</a:t>
+            </a:r>
+          </a:p>
+          <a:p>
+            <a:pPr>
+              <a:defRPr sz="1300">
+                <a:solidFill>
+                  <a:srgbClr val="334155"/>
+                </a:solidFill>
+              </a:defRPr>
+            </a:pPr>
+            <a:r>
+              <a:t>• Trip Scheduling &amp; Real-Time Seat Allocation with ACID concurrency control</a:t>
+            </a:r>
+          </a:p>
+          <a:p>
+            <a:pPr>
+              <a:defRPr sz="1300">
+                <a:solidFill>
+                  <a:srgbClr val="334155"/>
+                </a:solidFill>
+              </a:defRPr>
+            </a:pPr>
+            <a:r>
+              <a:t>• Card Payment Processing &amp; Instant Booking Confirmation vouchers</a:t>
+            </a:r>
+          </a:p>
+          <a:p>
+            <a:pPr>
+              <a:defRPr sz="1300">
+                <a:solidFill>
+                  <a:srgbClr val="334155"/>
+                </a:solidFill>
+              </a:defRPr>
+            </a:pPr>
+            <a:r>
+              <a:t>• Preventative Maintenance Tracking with automated 6-month servicing compliance</a:t>
+            </a:r>
+          </a:p>
+          <a:p>
+            <a:pPr>
+              <a:defRPr sz="1300">
+                <a:solidFill>
+                  <a:srgbClr val="334155"/>
+                </a:solidFill>
+              </a:defRPr>
+            </a:pPr>
+            <a:r>
+              <a:t>• Customer Feedback, Multi-criteria Reviews, and Cloud Announcements</a:t>
+            </a:r>
           </a:p>
         </p:txBody>
       </p:sp>
@@ -23078,6 +23357,185 @@
           </a:prstGeom>
         </p:spPr>
       </p:pic>
+      <p:sp>
+        <p:nvSpPr>
+          <p:cNvPr id="10" name="TextBox 9"/>
+          <p:cNvSpPr txBox="1"/>
+          <p:nvPr/>
+        </p:nvSpPr>
+        <p:spPr>
+          <a:xfrm>
+            <a:off x="914400" y="1828800"/>
+            <a:ext cx="7772400" cy="4114800"/>
+          </a:xfrm>
+          <a:prstGeom prst="rect">
+            <a:avLst/>
+          </a:prstGeom>
+          <a:noFill/>
+        </p:spPr>
+        <p:txBody>
+          <a:bodyPr wrap="square">
+            <a:spAutoFit/>
+          </a:bodyPr>
+          <a:lstStyle/>
+          <a:p>
+            <a:pPr>
+              <a:defRPr b="1" sz="1800">
+                <a:solidFill>
+                  <a:srgbClr val="0F172A"/>
+                </a:solidFill>
+              </a:defRPr>
+            </a:pPr>
+            <a:r>
+              <a:t>Enhanced Entity-Relationship (EER) Architecture</a:t>
+            </a:r>
+          </a:p>
+          <a:p>
+            <a:pPr>
+              <a:defRPr sz="1300" b="1">
+                <a:solidFill>
+                  <a:srgbClr val="2563EB"/>
+                </a:solidFill>
+              </a:defRPr>
+            </a:pPr>
+            <a:r>
+              <a:t>Core Entity Model (Full High-Resolution Diagram in docs/diagrams/DM02_ER.pdf):</a:t>
+            </a:r>
+          </a:p>
+          <a:p>
+            <a:pPr>
+              <a:defRPr sz="1300">
+                <a:solidFill>
+                  <a:srgbClr val="475569"/>
+                </a:solidFill>
+              </a:defRPr>
+            </a:pPr>
+            <a:r>
+              <a:t>  • PASSENGER: Registered travelers with unique credentials and booking privileges.</a:t>
+            </a:r>
+          </a:p>
+          <a:p>
+            <a:pPr>
+              <a:defRPr sz="1300">
+                <a:solidFill>
+                  <a:srgbClr val="475569"/>
+                </a:solidFill>
+              </a:defRPr>
+            </a:pPr>
+            <a:r>
+              <a:t>  • DRIVER: Professional operators holding commercial licenses and safety ratings.</a:t>
+            </a:r>
+          </a:p>
+          <a:p>
+            <a:pPr>
+              <a:defRPr sz="1300">
+                <a:solidFill>
+                  <a:srgbClr val="475569"/>
+                </a:solidFill>
+              </a:defRPr>
+            </a:pPr>
+            <a:r>
+              <a:t>  • VEHICLE: Fleet assets (Luxury Coach, Mini Bus, Standard) with capacity tracking.</a:t>
+            </a:r>
+          </a:p>
+          <a:p>
+            <a:pPr>
+              <a:defRPr sz="1300">
+                <a:solidFill>
+                  <a:srgbClr val="475569"/>
+                </a:solidFill>
+              </a:defRPr>
+            </a:pPr>
+            <a:r>
+              <a:t>  • ROUTE: Geographic paths (Origin, Destination, Distance km, Base Fare).</a:t>
+            </a:r>
+          </a:p>
+          <a:p>
+            <a:pPr>
+              <a:defRPr sz="1300">
+                <a:solidFill>
+                  <a:srgbClr val="475569"/>
+                </a:solidFill>
+              </a:defRPr>
+            </a:pPr>
+            <a:r>
+              <a:t>  • TRIP: Core junction entity linking Route, Vehicle, Driver with schedule &amp; seat ledger.</a:t>
+            </a:r>
+          </a:p>
+          <a:p>
+            <a:pPr>
+              <a:defRPr sz="1300">
+                <a:solidFill>
+                  <a:srgbClr val="475569"/>
+                </a:solidFill>
+              </a:defRPr>
+            </a:pPr>
+            <a:r>
+              <a:t>  • BOOKING: Passenger ticket reservation with transaction states (Pending, Confirmed).</a:t>
+            </a:r>
+          </a:p>
+          <a:p>
+            <a:pPr>
+              <a:defRPr sz="1300">
+                <a:solidFill>
+                  <a:srgbClr val="475569"/>
+                </a:solidFill>
+              </a:defRPr>
+            </a:pPr>
+            <a:r>
+              <a:t>  • PAYMENT: Financial ledger recording card clearance and transaction references.</a:t>
+            </a:r>
+          </a:p>
+          <a:p>
+            <a:pPr>
+              <a:defRPr sz="1300">
+                <a:solidFill>
+                  <a:srgbClr val="475569"/>
+                </a:solidFill>
+              </a:defRPr>
+            </a:pPr>
+            <a:r>
+              <a:t>  • MAINTENANCE &amp; FEEDBACK: Operational upkeep logs and passenger customer ratings.</a:t>
+            </a:r>
+          </a:p>
+          <a:p>
+            <a:pPr>
+              <a:defRPr sz="1300" b="1">
+                <a:solidFill>
+                  <a:srgbClr val="2563EB"/>
+                </a:solidFill>
+              </a:defRPr>
+            </a:pPr>
+            <a:r>
+              <a:t>Multiplicities: 1:M (Route-&gt;Trip, Vehicle-&gt;Trip, Driver-&gt;Trip, Passenger-&gt;Booking, Trip-&gt;Booking).</a:t>
+            </a:r>
+          </a:p>
+        </p:txBody>
+      </p:sp>
+      <p:pic>
+        <p:nvPicPr>
+          <p:cNvPr id="11" name="Picture 10" descr="DM02_SCHEMA_3NF.png"/>
+          <p:cNvPicPr>
+            <a:picLocks noChangeAspect="1"/>
+          </p:cNvPicPr>
+          <p:nvPr/>
+        </p:nvPicPr>
+        <p:blipFill>
+          <a:blip r:embed="rId3"/>
+          <a:stretch>
+            <a:fillRect/>
+          </a:stretch>
+        </p:blipFill>
+        <p:spPr>
+          <a:xfrm>
+            <a:off x="548640" y="1645920"/>
+            <a:ext cx="8046720" cy="5082139"/>
+          </a:xfrm>
+          <a:prstGeom prst="rect">
+            <a:avLst/>
+          </a:prstGeom>
+        </p:spPr>
+      </p:pic>
     </p:spTree>
     <p:extLst>
       <p:ext uri="{BB962C8B-B14F-4D97-AF65-F5344CB8AC3E}">
@@ -23168,11 +23626,128 @@
           </a:fontRef>
         </p:style>
         <p:txBody>
-          <a:bodyPr rtlCol="0" anchor="ctr"/>
+          <a:bodyPr rtlCol="0" anchor="ctr" wrap="square"/>
           <a:lstStyle/>
           <a:p>
-            <a:pPr algn="ctr"/>
+            <a:pPr algn="ctr">
+              <a:defRPr b="1" sz="1800">
+                <a:solidFill>
+                  <a:srgbClr val="0F172A"/>
+                </a:solidFill>
+              </a:defRPr>
+            </a:pPr>
+            <a:r>
+              <a:t>Relational Schema Design &amp; 3NF Integrity</a:t>
+            </a:r>
             <a:endParaRPr lang="en-US"/>
+          </a:p>
+          <a:p>
+            <a:pPr>
+              <a:defRPr sz="1300" b="1">
+                <a:solidFill>
+                  <a:srgbClr val="2563EB"/>
+                </a:solidFill>
+              </a:defRPr>
+            </a:pPr>
+            <a:r>
+              <a:t>Relational Transformation (Full Schema in docs/diagrams/DM02_SCHEMA.pdf):</a:t>
+            </a:r>
+          </a:p>
+          <a:p>
+            <a:pPr>
+              <a:defRPr sz="1300">
+                <a:solidFill>
+                  <a:srgbClr val="475569"/>
+                </a:solidFill>
+              </a:defRPr>
+            </a:pPr>
+            <a:r>
+              <a:t>  • 1NF: Atomic attributes, unique primary keys (SEQ_*) generated via Oracle sequences.</a:t>
+            </a:r>
+          </a:p>
+          <a:p>
+            <a:pPr>
+              <a:defRPr sz="1300">
+                <a:solidFill>
+                  <a:srgbClr val="475569"/>
+                </a:solidFill>
+              </a:defRPr>
+            </a:pPr>
+            <a:r>
+              <a:t>  • 2NF: No partial key dependencies; composite foreign keys separated into junction tables.</a:t>
+            </a:r>
+          </a:p>
+          <a:p>
+            <a:pPr>
+              <a:defRPr sz="1300">
+                <a:solidFill>
+                  <a:srgbClr val="475569"/>
+                </a:solidFill>
+              </a:defRPr>
+            </a:pPr>
+            <a:r>
+              <a:t>  • 3NF: Elimination of transitive dependencies (e.g., driver details not stored in vehicle).</a:t>
+            </a:r>
+          </a:p>
+          <a:p>
+            <a:pPr>
+              <a:defRPr sz="1300" b="1">
+                <a:solidFill>
+                  <a:srgbClr val="2563EB"/>
+                </a:solidFill>
+              </a:defRPr>
+            </a:pPr>
+            <a:r>
+              <a:t>Integrity Constraints &amp; Referential Rules:</a:t>
+            </a:r>
+          </a:p>
+          <a:p>
+            <a:pPr>
+              <a:defRPr sz="1300">
+                <a:solidFill>
+                  <a:srgbClr val="475569"/>
+                </a:solidFill>
+              </a:defRPr>
+            </a:pPr>
+            <a:r>
+              <a:t>  • Primary Keys: Unique sequence-backed IDs for all 9 relational tables.</a:t>
+            </a:r>
+          </a:p>
+          <a:p>
+            <a:pPr>
+              <a:defRPr sz="1300">
+                <a:solidFill>
+                  <a:srgbClr val="475569"/>
+                </a:solidFill>
+              </a:defRPr>
+            </a:pPr>
+            <a:r>
+              <a:t>  • Foreign Keys: Referential enforcement on TRIP, BOOKING, PAYMENT, MAINTENANCE, FEEDBACK.</a:t>
+            </a:r>
+          </a:p>
+          <a:p>
+            <a:pPr>
+              <a:defRPr sz="1300">
+                <a:solidFill>
+                  <a:srgbClr val="475569"/>
+                </a:solidFill>
+              </a:defRPr>
+            </a:pPr>
+            <a:r>
+              <a:t>  • Check Constraints: Status enums ('ACTIVE','INACTIVE','MAINTENANCE','COMPLETED').</a:t>
+            </a:r>
+          </a:p>
+          <a:p>
+            <a:pPr>
+              <a:defRPr sz="1300">
+                <a:solidFill>
+                  <a:srgbClr val="475569"/>
+                </a:solidFill>
+              </a:defRPr>
+            </a:pPr>
+            <a:r>
+              <a:t>  • Unique Constraints: PASSENGER(email), DRIVER(license_number), VEHICLE(registration_number).</a:t>
+            </a:r>
           </a:p>
         </p:txBody>
       </p:sp>
@@ -23820,6 +24395,30 @@
           </a:graphicData>
         </a:graphic>
       </p:graphicFrame>
+      <p:pic>
+        <p:nvPicPr>
+          <p:cNvPr id="12" name="Picture 11" descr="DM02_SCHEMA_3NF.png"/>
+          <p:cNvPicPr>
+            <a:picLocks noChangeAspect="1"/>
+          </p:cNvPicPr>
+          <p:nvPr/>
+        </p:nvPicPr>
+        <p:blipFill>
+          <a:blip r:embed="rId7"/>
+          <a:stretch>
+            <a:fillRect/>
+          </a:stretch>
+        </p:blipFill>
+        <p:spPr>
+          <a:xfrm>
+            <a:off x="548640" y="1645920"/>
+            <a:ext cx="8046720" cy="5082139"/>
+          </a:xfrm>
+          <a:prstGeom prst="rect">
+            <a:avLst/>
+          </a:prstGeom>
+        </p:spPr>
+      </p:pic>
     </p:spTree>
     <p:extLst>
       <p:ext uri="{BB962C8B-B14F-4D97-AF65-F5344CB8AC3E}">
